--- a/public/fun/pack/pptx/weddingpro/결혼식프리미엄_39_오시는길중심_미드나잇실버.pptx
+++ b/public/fun/pack/pptx/weddingpro/결혼식프리미엄_39_오시는길중심_미드나잇실버.pptx
@@ -113,12 +113,12 @@
   <p:extLst>
     <p:ext uri="{521415D9-36F7-43E2-AB2F-B90AF26B5E84}">
       <p14:sectionLst xmlns:p14="http://schemas.microsoft.com/office/powerpoint/2010/main">
-        <p14:section name="시작" id="{A51AAC40-C9FD-40D2-827B-4F40B2B2F296}">
+        <p14:section name="시작" id="{F2FA6A24-B7D6-4E24-A83B-1FDEA4D9030C}">
           <p14:sldIdLst>
             <p14:sldId id="256"/>
           </p14:sldIdLst>
         </p14:section>
-        <p14:section name="본문" id="{861AD00C-11B5-4EB8-9D8B-C2E6696E7ABB}">
+        <p14:section name="본문" id="{418B0F09-733C-4F0B-8226-013CB2C60816}">
           <p14:sldIdLst>
             <p14:sldId id="257"/>
             <p14:sldId id="258"/>
@@ -127,7 +127,7 @@
             <p14:sldId id="261"/>
           </p14:sldIdLst>
         </p14:section>
-        <p14:section name="마무리" id="{D4029583-7F37-4DEC-87EA-97694D38F749}">
+        <p14:section name="마무리" id="{527E7C7C-A82E-4233-911F-3FB6F1000889}">
           <p14:sldIdLst>
             <p14:sldId id="262"/>
           </p14:sldIdLst>
@@ -1601,7 +1601,7 @@
             </a:lvl1pPr>
           </a:lstStyle>
           <a:p>
-            <a:fld id="{624A7D1F-C914-4CB9-BAF1-A756019CE2EB}" type="slidenum">
+            <a:fld id="{A4F881BE-304E-45C3-A17D-FB33ADEB01F4}" type="slidenum">
               <a:rPr lang="en-US"/>
               <a:t>‹#›</a:t>
             </a:fld>
@@ -2410,7 +2410,7 @@
             </a:lvl1pPr>
           </a:lstStyle>
           <a:p>
-            <a:fld id="{01EE506B-CC0B-43BB-B74F-43319D8D8D6D}" type="slidenum">
+            <a:fld id="{8206BE93-AB1A-45C2-A929-5531C455FFA5}" type="slidenum">
               <a:rPr lang="en-US"/>
               <a:t>‹#›</a:t>
             </a:fld>
@@ -3156,7 +3156,7 @@
             </a:lvl1pPr>
           </a:lstStyle>
           <a:p>
-            <a:fld id="{2C8CF818-F27B-4083-88FF-62CCE5A1FF63}" type="slidenum">
+            <a:fld id="{E4EFEFF3-A92D-4910-9BAA-C584512B1CB5}" type="slidenum">
               <a:rPr lang="en-US"/>
               <a:t>‹#›</a:t>
             </a:fld>
@@ -4047,7 +4047,7 @@
           <a:p>
             <a:r>
               <a:rPr lang="ko-KR"/>
-              <a:t>0000. 00. 00 · 예식장 이름</a:t>
+              <a:t>날짜 입력 · 예식장 이름</a:t>
             </a:r>
           </a:p>
         </p:txBody>
@@ -4290,7 +4290,7 @@
           <a:bodyPr/>
           <a:lstStyle/>
           <a:p>
-            <a:fld id="{5F3C260F-FE87-4D0D-AC09-E5ED8922E4AB}" type="slidenum">
+            <a:fld id="{549B33AC-BDA5-4041-BEC7-F5F6D7D797FE}" type="slidenum">
               <a:rPr lang="en-US"/>
               <a:t>‹#›</a:t>
             </a:fld>
@@ -4831,7 +4831,7 @@
           <a:bodyPr/>
           <a:lstStyle/>
           <a:p>
-            <a:fld id="{6491A31C-211F-43FD-BC4A-A93ABE165364}" type="slidenum">
+            <a:fld id="{FC55518F-BB31-418B-82E1-E80789C1C558}" type="slidenum">
               <a:rPr lang="en-US"/>
               <a:t>‹#›</a:t>
             </a:fld>
@@ -5291,7 +5291,7 @@
           <a:bodyPr/>
           <a:lstStyle/>
           <a:p>
-            <a:fld id="{92B34CE2-55E7-448B-B640-00FB426A8C92}" type="slidenum">
+            <a:fld id="{1F8C0CEE-52EB-4188-A96F-35EEC0C82559}" type="slidenum">
               <a:rPr lang="en-US"/>
               <a:t>‹#›</a:t>
             </a:fld>
@@ -6664,7 +6664,7 @@
           <a:bodyPr/>
           <a:lstStyle/>
           <a:p>
-            <a:fld id="{0ABCC823-1F95-4150-989B-42C37E9D4DD9}" type="slidenum">
+            <a:fld id="{CB6B909A-FF34-4E68-A648-83E6CEF54ED7}" type="slidenum">
               <a:rPr lang="en-US"/>
               <a:t>‹#›</a:t>
             </a:fld>
@@ -6774,7 +6774,7 @@
           <a:bodyPr/>
           <a:lstStyle/>
           <a:p>
-            <a:fld id="{AF76408C-045D-42EB-9E4D-8F7F9E93B05C}" type="slidenum">
+            <a:fld id="{043A4819-30F1-4CC9-873F-4C60F4C7A4AF}" type="slidenum">
               <a:rPr lang="en-US"/>
               <a:t>‹#›</a:t>
             </a:fld>
